--- a/Kovta_Nyrt_EN.pptx
+++ b/Kovta_Nyrt_EN.pptx
@@ -2108,7 +2108,7 @@
           <a:p>
             <a:fld id="{64E71317-EACD-4ACE-B971-84E39F8DD59C}" type="datetimeFigureOut">
               <a:rPr lang="hu-HU" smtClean="0"/>
-              <a:t>2026. 02. 27.</a:t>
+              <a:t>2026. 03. 02.</a:t>
             </a:fld>
             <a:endParaRPr lang="hu-HU"/>
           </a:p>
@@ -2395,7 +2395,7 @@
           <a:p>
             <a:fld id="{64E71317-EACD-4ACE-B971-84E39F8DD59C}" type="datetimeFigureOut">
               <a:rPr lang="hu-HU" smtClean="0"/>
-              <a:t>2026. 02. 27.</a:t>
+              <a:t>2026. 03. 02.</a:t>
             </a:fld>
             <a:endParaRPr lang="hu-HU"/>
           </a:p>
@@ -2601,7 +2601,7 @@
           <a:p>
             <a:fld id="{64E71317-EACD-4ACE-B971-84E39F8DD59C}" type="datetimeFigureOut">
               <a:rPr lang="hu-HU" smtClean="0"/>
-              <a:t>2026. 02. 27.</a:t>
+              <a:t>2026. 03. 02.</a:t>
             </a:fld>
             <a:endParaRPr lang="hu-HU"/>
           </a:p>
@@ -2886,7 +2886,7 @@
           <a:p>
             <a:fld id="{64E71317-EACD-4ACE-B971-84E39F8DD59C}" type="datetimeFigureOut">
               <a:rPr lang="hu-HU" smtClean="0"/>
-              <a:t>2026. 02. 27.</a:t>
+              <a:t>2026. 03. 02.</a:t>
             </a:fld>
             <a:endParaRPr lang="hu-HU"/>
           </a:p>
@@ -3239,7 +3239,7 @@
           <a:p>
             <a:fld id="{64E71317-EACD-4ACE-B971-84E39F8DD59C}" type="datetimeFigureOut">
               <a:rPr lang="hu-HU" smtClean="0"/>
-              <a:t>2026. 02. 27.</a:t>
+              <a:t>2026. 03. 02.</a:t>
             </a:fld>
             <a:endParaRPr lang="hu-HU"/>
           </a:p>
@@ -3874,7 +3874,7 @@
           <a:p>
             <a:fld id="{64E71317-EACD-4ACE-B971-84E39F8DD59C}" type="datetimeFigureOut">
               <a:rPr lang="hu-HU" smtClean="0"/>
-              <a:t>2026. 02. 27.</a:t>
+              <a:t>2026. 03. 02.</a:t>
             </a:fld>
             <a:endParaRPr lang="hu-HU"/>
           </a:p>
@@ -4746,7 +4746,7 @@
           <a:p>
             <a:fld id="{64E71317-EACD-4ACE-B971-84E39F8DD59C}" type="datetimeFigureOut">
               <a:rPr lang="hu-HU" smtClean="0"/>
-              <a:t>2026. 02. 27.</a:t>
+              <a:t>2026. 03. 02.</a:t>
             </a:fld>
             <a:endParaRPr lang="hu-HU"/>
           </a:p>
@@ -4928,7 +4928,7 @@
           <a:p>
             <a:fld id="{64E71317-EACD-4ACE-B971-84E39F8DD59C}" type="datetimeFigureOut">
               <a:rPr lang="hu-HU" smtClean="0"/>
-              <a:t>2026. 02. 27.</a:t>
+              <a:t>2026. 03. 02.</a:t>
             </a:fld>
             <a:endParaRPr lang="hu-HU"/>
           </a:p>
@@ -5120,7 +5120,7 @@
           <a:p>
             <a:fld id="{64E71317-EACD-4ACE-B971-84E39F8DD59C}" type="datetimeFigureOut">
               <a:rPr lang="hu-HU" smtClean="0"/>
-              <a:t>2026. 02. 27.</a:t>
+              <a:t>2026. 03. 02.</a:t>
             </a:fld>
             <a:endParaRPr lang="hu-HU"/>
           </a:p>
@@ -5302,7 +5302,7 @@
           <a:p>
             <a:fld id="{64E71317-EACD-4ACE-B971-84E39F8DD59C}" type="datetimeFigureOut">
               <a:rPr lang="hu-HU" smtClean="0"/>
-              <a:t>2026. 02. 27.</a:t>
+              <a:t>2026. 03. 02.</a:t>
             </a:fld>
             <a:endParaRPr lang="hu-HU"/>
           </a:p>
@@ -5561,7 +5561,7 @@
           <a:p>
             <a:fld id="{64E71317-EACD-4ACE-B971-84E39F8DD59C}" type="datetimeFigureOut">
               <a:rPr lang="hu-HU" smtClean="0"/>
-              <a:t>2026. 02. 27.</a:t>
+              <a:t>2026. 03. 02.</a:t>
             </a:fld>
             <a:endParaRPr lang="hu-HU"/>
           </a:p>
@@ -5865,7 +5865,7 @@
           <a:p>
             <a:fld id="{64E71317-EACD-4ACE-B971-84E39F8DD59C}" type="datetimeFigureOut">
               <a:rPr lang="hu-HU" smtClean="0"/>
-              <a:t>2026. 02. 27.</a:t>
+              <a:t>2026. 03. 02.</a:t>
             </a:fld>
             <a:endParaRPr lang="hu-HU"/>
           </a:p>
@@ -6321,7 +6321,7 @@
           <a:p>
             <a:fld id="{64E71317-EACD-4ACE-B971-84E39F8DD59C}" type="datetimeFigureOut">
               <a:rPr lang="hu-HU" smtClean="0"/>
-              <a:t>2026. 02. 27.</a:t>
+              <a:t>2026. 03. 02.</a:t>
             </a:fld>
             <a:endParaRPr lang="hu-HU"/>
           </a:p>
@@ -6451,7 +6451,7 @@
           <a:p>
             <a:fld id="{64E71317-EACD-4ACE-B971-84E39F8DD59C}" type="datetimeFigureOut">
               <a:rPr lang="hu-HU" smtClean="0"/>
-              <a:t>2026. 02. 27.</a:t>
+              <a:t>2026. 03. 02.</a:t>
             </a:fld>
             <a:endParaRPr lang="hu-HU"/>
           </a:p>
@@ -6558,7 +6558,7 @@
           <a:p>
             <a:fld id="{64E71317-EACD-4ACE-B971-84E39F8DD59C}" type="datetimeFigureOut">
               <a:rPr lang="hu-HU" smtClean="0"/>
-              <a:t>2026. 02. 27.</a:t>
+              <a:t>2026. 03. 02.</a:t>
             </a:fld>
             <a:endParaRPr lang="hu-HU"/>
           </a:p>
@@ -6849,7 +6849,7 @@
           <a:p>
             <a:fld id="{64E71317-EACD-4ACE-B971-84E39F8DD59C}" type="datetimeFigureOut">
               <a:rPr lang="hu-HU" smtClean="0"/>
-              <a:t>2026. 02. 27.</a:t>
+              <a:t>2026. 03. 02.</a:t>
             </a:fld>
             <a:endParaRPr lang="hu-HU"/>
           </a:p>
@@ -7136,7 +7136,7 @@
           <a:p>
             <a:fld id="{64E71317-EACD-4ACE-B971-84E39F8DD59C}" type="datetimeFigureOut">
               <a:rPr lang="hu-HU" smtClean="0"/>
-              <a:t>2026. 02. 27.</a:t>
+              <a:t>2026. 03. 02.</a:t>
             </a:fld>
             <a:endParaRPr lang="hu-HU"/>
           </a:p>
@@ -7591,7 +7591,7 @@
           <a:p>
             <a:fld id="{64E71317-EACD-4ACE-B971-84E39F8DD59C}" type="datetimeFigureOut">
               <a:rPr lang="hu-HU" smtClean="0"/>
-              <a:t>2026. 02. 27.</a:t>
+              <a:t>2026. 03. 02.</a:t>
             </a:fld>
             <a:endParaRPr lang="hu-HU"/>
           </a:p>
@@ -9756,17 +9756,28 @@
             <p:ph type="title"/>
           </p:nvPr>
         </p:nvSpPr>
-        <p:spPr/>
+        <p:spPr>
+          <a:xfrm>
+            <a:off x="3525491" y="534951"/>
+            <a:ext cx="4923566" cy="1400530"/>
+          </a:xfrm>
+        </p:spPr>
         <p:txBody>
           <a:bodyPr/>
           <a:lstStyle/>
           <a:p>
             <a:r>
-              <a:rPr lang="hu-HU" dirty="0" err="1"/>
+              <a:rPr lang="hu-HU" sz="5400" b="1" dirty="0" err="1">
+                <a:latin typeface="Times New Roman" panose="02020603050405020304" pitchFamily="18" charset="0"/>
+                <a:cs typeface="Times New Roman" panose="02020603050405020304" pitchFamily="18" charset="0"/>
+              </a:rPr>
               <a:t>Virtual</a:t>
             </a:r>
             <a:r>
-              <a:rPr lang="hu-HU" dirty="0"/>
+              <a:rPr lang="hu-HU" sz="5400" b="1" dirty="0">
+                <a:latin typeface="Times New Roman" panose="02020603050405020304" pitchFamily="18" charset="0"/>
+                <a:cs typeface="Times New Roman" panose="02020603050405020304" pitchFamily="18" charset="0"/>
+              </a:rPr>
               <a:t> servers</a:t>
             </a:r>
           </a:p>
@@ -9788,115 +9799,224 @@
             <p:ph idx="1"/>
           </p:nvPr>
         </p:nvSpPr>
-        <p:spPr/>
+        <p:spPr>
+          <a:xfrm>
+            <a:off x="893000" y="1935481"/>
+            <a:ext cx="8946541" cy="4195481"/>
+          </a:xfrm>
+        </p:spPr>
         <p:txBody>
-          <a:bodyPr/>
+          <a:bodyPr>
+            <a:noAutofit/>
+          </a:bodyPr>
           <a:lstStyle/>
           <a:p>
-            <a:r>
-              <a:rPr lang="hu-HU" dirty="0" err="1"/>
+            <a:pPr>
+              <a:buFont typeface="Arial" panose="020B0604020202020204" pitchFamily="34" charset="0"/>
+              <a:buChar char="•"/>
+            </a:pPr>
+            <a:r>
+              <a:rPr lang="hu-HU" dirty="0" err="1">
+                <a:latin typeface="Times New Roman" panose="02020603050405020304" pitchFamily="18" charset="0"/>
+                <a:cs typeface="Times New Roman" panose="02020603050405020304" pitchFamily="18" charset="0"/>
+              </a:rPr>
               <a:t>We</a:t>
             </a:r>
             <a:r>
-              <a:rPr lang="hu-HU" dirty="0"/>
+              <a:rPr lang="hu-HU" dirty="0">
+                <a:latin typeface="Times New Roman" panose="02020603050405020304" pitchFamily="18" charset="0"/>
+                <a:cs typeface="Times New Roman" panose="02020603050405020304" pitchFamily="18" charset="0"/>
+              </a:rPr>
               <a:t> </a:t>
             </a:r>
             <a:r>
-              <a:rPr lang="hu-HU" dirty="0" err="1"/>
+              <a:rPr lang="hu-HU" dirty="0" err="1">
+                <a:latin typeface="Times New Roman" panose="02020603050405020304" pitchFamily="18" charset="0"/>
+                <a:cs typeface="Times New Roman" panose="02020603050405020304" pitchFamily="18" charset="0"/>
+              </a:rPr>
               <a:t>used</a:t>
             </a:r>
             <a:r>
-              <a:rPr lang="hu-HU" dirty="0"/>
+              <a:rPr lang="hu-HU" dirty="0">
+                <a:latin typeface="Times New Roman" panose="02020603050405020304" pitchFamily="18" charset="0"/>
+                <a:cs typeface="Times New Roman" panose="02020603050405020304" pitchFamily="18" charset="0"/>
+              </a:rPr>
               <a:t> </a:t>
             </a:r>
             <a:r>
-              <a:rPr lang="hu-HU" dirty="0" err="1"/>
+              <a:rPr lang="hu-HU" dirty="0" err="1">
+                <a:latin typeface="Times New Roman" panose="02020603050405020304" pitchFamily="18" charset="0"/>
+                <a:cs typeface="Times New Roman" panose="02020603050405020304" pitchFamily="18" charset="0"/>
+              </a:rPr>
               <a:t>Virtual</a:t>
             </a:r>
             <a:r>
-              <a:rPr lang="hu-HU" dirty="0"/>
-              <a:t> boksz</a:t>
-            </a:r>
+              <a:rPr lang="hu-HU" dirty="0">
+                <a:latin typeface="Times New Roman" panose="02020603050405020304" pitchFamily="18" charset="0"/>
+                <a:cs typeface="Times New Roman" panose="02020603050405020304" pitchFamily="18" charset="0"/>
+              </a:rPr>
+              <a:t> </a:t>
+            </a:r>
+            <a:r>
+              <a:rPr lang="hu-HU" dirty="0" err="1">
+                <a:latin typeface="Times New Roman" panose="02020603050405020304" pitchFamily="18" charset="0"/>
+                <a:cs typeface="Times New Roman" panose="02020603050405020304" pitchFamily="18" charset="0"/>
+              </a:rPr>
+              <a:t>box</a:t>
+            </a:r>
+            <a:endParaRPr lang="hu-HU" dirty="0">
+              <a:latin typeface="Times New Roman" panose="02020603050405020304" pitchFamily="18" charset="0"/>
+              <a:cs typeface="Times New Roman" panose="02020603050405020304" pitchFamily="18" charset="0"/>
+            </a:endParaRPr>
           </a:p>
           <a:p>
             <a:pPr lvl="1"/>
             <a:r>
-              <a:rPr lang="hu-HU" dirty="0"/>
-              <a:t>Windows 2019</a:t>
-            </a:r>
-          </a:p>
-          <a:p>
-            <a:pPr lvl="2"/>
-            <a:r>
-              <a:rPr lang="hu-HU" dirty="0" err="1"/>
+              <a:rPr lang="hu-HU" sz="2000" dirty="0">
+                <a:latin typeface="Times New Roman" panose="02020603050405020304" pitchFamily="18" charset="0"/>
+                <a:cs typeface="Times New Roman" panose="02020603050405020304" pitchFamily="18" charset="0"/>
+              </a:rPr>
+              <a:t>Windows 2019:</a:t>
+            </a:r>
+          </a:p>
+          <a:p>
+            <a:pPr lvl="2">
+              <a:buFont typeface="Courier New" panose="02070309020205020404" pitchFamily="49" charset="0"/>
+              <a:buChar char="o"/>
+            </a:pPr>
+            <a:r>
+              <a:rPr lang="hu-HU" sz="2000" dirty="0" err="1">
+                <a:latin typeface="Times New Roman" panose="02020603050405020304" pitchFamily="18" charset="0"/>
+                <a:cs typeface="Times New Roman" panose="02020603050405020304" pitchFamily="18" charset="0"/>
+              </a:rPr>
               <a:t>Active</a:t>
             </a:r>
             <a:r>
-              <a:rPr lang="hu-HU" dirty="0"/>
+              <a:rPr lang="hu-HU" sz="2000" dirty="0">
+                <a:latin typeface="Times New Roman" panose="02020603050405020304" pitchFamily="18" charset="0"/>
+                <a:cs typeface="Times New Roman" panose="02020603050405020304" pitchFamily="18" charset="0"/>
+              </a:rPr>
               <a:t> </a:t>
             </a:r>
             <a:r>
-              <a:rPr lang="hu-HU" dirty="0" err="1"/>
+              <a:rPr lang="hu-HU" sz="2000" dirty="0" err="1">
+                <a:latin typeface="Times New Roman" panose="02020603050405020304" pitchFamily="18" charset="0"/>
+                <a:cs typeface="Times New Roman" panose="02020603050405020304" pitchFamily="18" charset="0"/>
+              </a:rPr>
               <a:t>Directory</a:t>
             </a:r>
-            <a:endParaRPr lang="hu-HU" dirty="0"/>
-          </a:p>
-          <a:p>
-            <a:pPr lvl="2"/>
-            <a:r>
-              <a:rPr lang="hu-HU" dirty="0"/>
+            <a:endParaRPr lang="hu-HU" sz="2000" dirty="0">
+              <a:latin typeface="Times New Roman" panose="02020603050405020304" pitchFamily="18" charset="0"/>
+              <a:cs typeface="Times New Roman" panose="02020603050405020304" pitchFamily="18" charset="0"/>
+            </a:endParaRPr>
+          </a:p>
+          <a:p>
+            <a:pPr lvl="2">
+              <a:buFont typeface="Courier New" panose="02070309020205020404" pitchFamily="49" charset="0"/>
+              <a:buChar char="o"/>
+            </a:pPr>
+            <a:r>
+              <a:rPr lang="hu-HU" sz="2000" dirty="0">
+                <a:latin typeface="Times New Roman" panose="02020603050405020304" pitchFamily="18" charset="0"/>
+                <a:cs typeface="Times New Roman" panose="02020603050405020304" pitchFamily="18" charset="0"/>
+              </a:rPr>
               <a:t>DNS server</a:t>
             </a:r>
           </a:p>
           <a:p>
-            <a:pPr lvl="2"/>
-            <a:r>
-              <a:rPr lang="hu-HU" dirty="0"/>
+            <a:pPr lvl="2">
+              <a:buFont typeface="Courier New" panose="02070309020205020404" pitchFamily="49" charset="0"/>
+              <a:buChar char="o"/>
+            </a:pPr>
+            <a:r>
+              <a:rPr lang="hu-HU" sz="2000" dirty="0">
+                <a:latin typeface="Times New Roman" panose="02020603050405020304" pitchFamily="18" charset="0"/>
+                <a:cs typeface="Times New Roman" panose="02020603050405020304" pitchFamily="18" charset="0"/>
+              </a:rPr>
               <a:t>DHCP server </a:t>
             </a:r>
           </a:p>
           <a:p>
-            <a:pPr lvl="2"/>
-            <a:r>
-              <a:rPr lang="hu-HU" dirty="0"/>
+            <a:pPr lvl="2">
+              <a:buFont typeface="Courier New" panose="02070309020205020404" pitchFamily="49" charset="0"/>
+              <a:buChar char="o"/>
+            </a:pPr>
+            <a:r>
+              <a:rPr lang="hu-HU" sz="2000" dirty="0">
+                <a:latin typeface="Times New Roman" panose="02020603050405020304" pitchFamily="18" charset="0"/>
+                <a:cs typeface="Times New Roman" panose="02020603050405020304" pitchFamily="18" charset="0"/>
+              </a:rPr>
               <a:t>HTTP/HTTPS</a:t>
             </a:r>
           </a:p>
           <a:p>
-            <a:pPr lvl="2"/>
-            <a:r>
-              <a:rPr lang="hu-HU" dirty="0"/>
+            <a:pPr lvl="2">
+              <a:buFont typeface="Courier New" panose="02070309020205020404" pitchFamily="49" charset="0"/>
+              <a:buChar char="o"/>
+            </a:pPr>
+            <a:r>
+              <a:rPr lang="hu-HU" sz="2000" dirty="0">
+                <a:latin typeface="Times New Roman" panose="02020603050405020304" pitchFamily="18" charset="0"/>
+                <a:cs typeface="Times New Roman" panose="02020603050405020304" pitchFamily="18" charset="0"/>
+              </a:rPr>
               <a:t>File and printer </a:t>
             </a:r>
             <a:r>
-              <a:rPr lang="hu-HU" dirty="0" err="1"/>
+              <a:rPr lang="hu-HU" sz="2000" dirty="0" err="1">
+                <a:latin typeface="Times New Roman" panose="02020603050405020304" pitchFamily="18" charset="0"/>
+                <a:cs typeface="Times New Roman" panose="02020603050405020304" pitchFamily="18" charset="0"/>
+              </a:rPr>
               <a:t>sharing</a:t>
             </a:r>
-            <a:endParaRPr lang="hu-HU" dirty="0"/>
-          </a:p>
-          <a:p>
-            <a:pPr lvl="2"/>
-            <a:r>
-              <a:rPr lang="en-US"/>
+            <a:endParaRPr lang="hu-HU" sz="2000" dirty="0">
+              <a:latin typeface="Times New Roman" panose="02020603050405020304" pitchFamily="18" charset="0"/>
+              <a:cs typeface="Times New Roman" panose="02020603050405020304" pitchFamily="18" charset="0"/>
+            </a:endParaRPr>
+          </a:p>
+          <a:p>
+            <a:pPr lvl="2">
+              <a:buFont typeface="Courier New" panose="02070309020205020404" pitchFamily="49" charset="0"/>
+              <a:buChar char="o"/>
+            </a:pPr>
+            <a:r>
+              <a:rPr lang="en-US" sz="2000" dirty="0">
+                <a:latin typeface="Times New Roman" panose="02020603050405020304" pitchFamily="18" charset="0"/>
+                <a:cs typeface="Times New Roman" panose="02020603050405020304" pitchFamily="18" charset="0"/>
+              </a:rPr>
               <a:t>Automated software deployment to client computers</a:t>
             </a:r>
-            <a:endParaRPr lang="hu-HU" dirty="0"/>
+            <a:endParaRPr lang="hu-HU" sz="2000" dirty="0">
+              <a:latin typeface="Times New Roman" panose="02020603050405020304" pitchFamily="18" charset="0"/>
+              <a:cs typeface="Times New Roman" panose="02020603050405020304" pitchFamily="18" charset="0"/>
+            </a:endParaRPr>
           </a:p>
           <a:p>
             <a:pPr lvl="1"/>
             <a:r>
-              <a:rPr lang="hu-HU" dirty="0"/>
+              <a:rPr lang="hu-HU" sz="2000" dirty="0">
+                <a:latin typeface="Times New Roman" panose="02020603050405020304" pitchFamily="18" charset="0"/>
+                <a:cs typeface="Times New Roman" panose="02020603050405020304" pitchFamily="18" charset="0"/>
+              </a:rPr>
               <a:t>Linux Debian 2013</a:t>
             </a:r>
           </a:p>
           <a:p>
-            <a:pPr lvl="2"/>
-            <a:r>
-              <a:rPr lang="hu-HU" dirty="0" err="1"/>
+            <a:pPr lvl="2">
+              <a:buFont typeface="Courier New" panose="02070309020205020404" pitchFamily="49" charset="0"/>
+              <a:buChar char="o"/>
+            </a:pPr>
+            <a:r>
+              <a:rPr lang="hu-HU" sz="2000" dirty="0" err="1">
+                <a:latin typeface="Times New Roman" panose="02020603050405020304" pitchFamily="18" charset="0"/>
+                <a:cs typeface="Times New Roman" panose="02020603050405020304" pitchFamily="18" charset="0"/>
+              </a:rPr>
               <a:t>Automated</a:t>
             </a:r>
             <a:r>
-              <a:rPr lang="hu-HU" dirty="0"/>
+              <a:rPr lang="hu-HU" sz="2000" dirty="0">
+                <a:latin typeface="Times New Roman" panose="02020603050405020304" pitchFamily="18" charset="0"/>
+                <a:cs typeface="Times New Roman" panose="02020603050405020304" pitchFamily="18" charset="0"/>
+              </a:rPr>
               <a:t> backup</a:t>
             </a:r>
           </a:p>
@@ -10922,7 +11042,7 @@
                 <a:latin typeface="Times New Roman" panose="02020603050405020304" pitchFamily="18" charset="0"/>
                 <a:cs typeface="Times New Roman" panose="02020603050405020304" pitchFamily="18" charset="0"/>
               </a:rPr>
-              <a:t>Future Development Plans</a:t>
+              <a:t>Future</a:t>
             </a:r>
             <a:r>
               <a:rPr lang="hu-HU" b="1" dirty="0">
@@ -10936,7 +11056,21 @@
                 <a:latin typeface="Times New Roman" panose="02020603050405020304" pitchFamily="18" charset="0"/>
                 <a:cs typeface="Times New Roman" panose="02020603050405020304" pitchFamily="18" charset="0"/>
               </a:rPr>
-              <a:t>history</a:t>
+              <a:t>Development</a:t>
+            </a:r>
+            <a:r>
+              <a:rPr lang="hu-HU" b="1" dirty="0">
+                <a:latin typeface="Times New Roman" panose="02020603050405020304" pitchFamily="18" charset="0"/>
+                <a:cs typeface="Times New Roman" panose="02020603050405020304" pitchFamily="18" charset="0"/>
+              </a:rPr>
+              <a:t> </a:t>
+            </a:r>
+            <a:r>
+              <a:rPr lang="hu-HU" b="1" dirty="0" err="1">
+                <a:latin typeface="Times New Roman" panose="02020603050405020304" pitchFamily="18" charset="0"/>
+                <a:cs typeface="Times New Roman" panose="02020603050405020304" pitchFamily="18" charset="0"/>
+              </a:rPr>
+              <a:t>Plans</a:t>
             </a:r>
             <a:endParaRPr lang="hu-HU" b="1" dirty="0">
               <a:latin typeface="Times New Roman" panose="02020603050405020304" pitchFamily="18" charset="0"/>
@@ -11042,7 +11176,7 @@
               <a:t>protocolls</a:t>
             </a:r>
             <a:r>
-              <a:rPr lang="hu-HU" b="1">
+              <a:rPr lang="hu-HU" b="1" dirty="0">
                 <a:latin typeface="Times New Roman" panose="02020603050405020304" pitchFamily="18" charset="0"/>
                 <a:cs typeface="Times New Roman" panose="02020603050405020304" pitchFamily="18" charset="0"/>
               </a:rPr>

--- a/Kovta_Nyrt_EN.pptx
+++ b/Kovta_Nyrt_EN.pptx
@@ -22551,7 +22551,7 @@
           <a:p>
             <a:fld id="{64E71317-EACD-4ACE-B971-84E39F8DD59C}" type="datetimeFigureOut">
               <a:rPr lang="hu-HU" smtClean="0"/>
-              <a:t>2026. 03. 03.</a:t>
+              <a:t>2026. 04. 23.</a:t>
             </a:fld>
             <a:endParaRPr lang="hu-HU"/>
           </a:p>
@@ -22838,7 +22838,7 @@
           <a:p>
             <a:fld id="{64E71317-EACD-4ACE-B971-84E39F8DD59C}" type="datetimeFigureOut">
               <a:rPr lang="hu-HU" smtClean="0"/>
-              <a:t>2026. 03. 03.</a:t>
+              <a:t>2026. 04. 23.</a:t>
             </a:fld>
             <a:endParaRPr lang="hu-HU"/>
           </a:p>
@@ -23044,7 +23044,7 @@
           <a:p>
             <a:fld id="{64E71317-EACD-4ACE-B971-84E39F8DD59C}" type="datetimeFigureOut">
               <a:rPr lang="hu-HU" smtClean="0"/>
-              <a:t>2026. 03. 03.</a:t>
+              <a:t>2026. 04. 23.</a:t>
             </a:fld>
             <a:endParaRPr lang="hu-HU"/>
           </a:p>
@@ -23329,7 +23329,7 @@
           <a:p>
             <a:fld id="{64E71317-EACD-4ACE-B971-84E39F8DD59C}" type="datetimeFigureOut">
               <a:rPr lang="hu-HU" smtClean="0"/>
-              <a:t>2026. 03. 03.</a:t>
+              <a:t>2026. 04. 23.</a:t>
             </a:fld>
             <a:endParaRPr lang="hu-HU"/>
           </a:p>
@@ -23682,7 +23682,7 @@
           <a:p>
             <a:fld id="{64E71317-EACD-4ACE-B971-84E39F8DD59C}" type="datetimeFigureOut">
               <a:rPr lang="hu-HU" smtClean="0"/>
-              <a:t>2026. 03. 03.</a:t>
+              <a:t>2026. 04. 23.</a:t>
             </a:fld>
             <a:endParaRPr lang="hu-HU"/>
           </a:p>
@@ -24317,7 +24317,7 @@
           <a:p>
             <a:fld id="{64E71317-EACD-4ACE-B971-84E39F8DD59C}" type="datetimeFigureOut">
               <a:rPr lang="hu-HU" smtClean="0"/>
-              <a:t>2026. 03. 03.</a:t>
+              <a:t>2026. 04. 23.</a:t>
             </a:fld>
             <a:endParaRPr lang="hu-HU"/>
           </a:p>
@@ -25189,7 +25189,7 @@
           <a:p>
             <a:fld id="{64E71317-EACD-4ACE-B971-84E39F8DD59C}" type="datetimeFigureOut">
               <a:rPr lang="hu-HU" smtClean="0"/>
-              <a:t>2026. 03. 03.</a:t>
+              <a:t>2026. 04. 23.</a:t>
             </a:fld>
             <a:endParaRPr lang="hu-HU"/>
           </a:p>
@@ -25371,7 +25371,7 @@
           <a:p>
             <a:fld id="{64E71317-EACD-4ACE-B971-84E39F8DD59C}" type="datetimeFigureOut">
               <a:rPr lang="hu-HU" smtClean="0"/>
-              <a:t>2026. 03. 03.</a:t>
+              <a:t>2026. 04. 23.</a:t>
             </a:fld>
             <a:endParaRPr lang="hu-HU"/>
           </a:p>
@@ -25563,7 +25563,7 @@
           <a:p>
             <a:fld id="{64E71317-EACD-4ACE-B971-84E39F8DD59C}" type="datetimeFigureOut">
               <a:rPr lang="hu-HU" smtClean="0"/>
-              <a:t>2026. 03. 03.</a:t>
+              <a:t>2026. 04. 23.</a:t>
             </a:fld>
             <a:endParaRPr lang="hu-HU"/>
           </a:p>
@@ -25745,7 +25745,7 @@
           <a:p>
             <a:fld id="{64E71317-EACD-4ACE-B971-84E39F8DD59C}" type="datetimeFigureOut">
               <a:rPr lang="hu-HU" smtClean="0"/>
-              <a:t>2026. 03. 03.</a:t>
+              <a:t>2026. 04. 23.</a:t>
             </a:fld>
             <a:endParaRPr lang="hu-HU"/>
           </a:p>
@@ -26004,7 +26004,7 @@
           <a:p>
             <a:fld id="{64E71317-EACD-4ACE-B971-84E39F8DD59C}" type="datetimeFigureOut">
               <a:rPr lang="hu-HU" smtClean="0"/>
-              <a:t>2026. 03. 03.</a:t>
+              <a:t>2026. 04. 23.</a:t>
             </a:fld>
             <a:endParaRPr lang="hu-HU"/>
           </a:p>
@@ -26308,7 +26308,7 @@
           <a:p>
             <a:fld id="{64E71317-EACD-4ACE-B971-84E39F8DD59C}" type="datetimeFigureOut">
               <a:rPr lang="hu-HU" smtClean="0"/>
-              <a:t>2026. 03. 03.</a:t>
+              <a:t>2026. 04. 23.</a:t>
             </a:fld>
             <a:endParaRPr lang="hu-HU"/>
           </a:p>
@@ -26764,7 +26764,7 @@
           <a:p>
             <a:fld id="{64E71317-EACD-4ACE-B971-84E39F8DD59C}" type="datetimeFigureOut">
               <a:rPr lang="hu-HU" smtClean="0"/>
-              <a:t>2026. 03. 03.</a:t>
+              <a:t>2026. 04. 23.</a:t>
             </a:fld>
             <a:endParaRPr lang="hu-HU"/>
           </a:p>
@@ -26894,7 +26894,7 @@
           <a:p>
             <a:fld id="{64E71317-EACD-4ACE-B971-84E39F8DD59C}" type="datetimeFigureOut">
               <a:rPr lang="hu-HU" smtClean="0"/>
-              <a:t>2026. 03. 03.</a:t>
+              <a:t>2026. 04. 23.</a:t>
             </a:fld>
             <a:endParaRPr lang="hu-HU"/>
           </a:p>
@@ -27001,7 +27001,7 @@
           <a:p>
             <a:fld id="{64E71317-EACD-4ACE-B971-84E39F8DD59C}" type="datetimeFigureOut">
               <a:rPr lang="hu-HU" smtClean="0"/>
-              <a:t>2026. 03. 03.</a:t>
+              <a:t>2026. 04. 23.</a:t>
             </a:fld>
             <a:endParaRPr lang="hu-HU"/>
           </a:p>
@@ -27292,7 +27292,7 @@
           <a:p>
             <a:fld id="{64E71317-EACD-4ACE-B971-84E39F8DD59C}" type="datetimeFigureOut">
               <a:rPr lang="hu-HU" smtClean="0"/>
-              <a:t>2026. 03. 03.</a:t>
+              <a:t>2026. 04. 23.</a:t>
             </a:fld>
             <a:endParaRPr lang="hu-HU"/>
           </a:p>
@@ -27579,7 +27579,7 @@
           <a:p>
             <a:fld id="{64E71317-EACD-4ACE-B971-84E39F8DD59C}" type="datetimeFigureOut">
               <a:rPr lang="hu-HU" smtClean="0"/>
-              <a:t>2026. 03. 03.</a:t>
+              <a:t>2026. 04. 23.</a:t>
             </a:fld>
             <a:endParaRPr lang="hu-HU"/>
           </a:p>
@@ -28034,7 +28034,7 @@
           <a:p>
             <a:fld id="{64E71317-EACD-4ACE-B971-84E39F8DD59C}" type="datetimeFigureOut">
               <a:rPr lang="hu-HU" smtClean="0"/>
-              <a:t>2026. 03. 03.</a:t>
+              <a:t>2026. 04. 23.</a:t>
             </a:fld>
             <a:endParaRPr lang="hu-HU"/>
           </a:p>
@@ -31183,6 +31183,30 @@
 <file path=ppt/slides/slide13.xml><?xml version="1.0" encoding="utf-8"?>
 <p:sld xmlns:a="http://schemas.openxmlformats.org/drawingml/2006/main" xmlns:r="http://schemas.openxmlformats.org/officeDocument/2006/relationships" xmlns:p="http://schemas.openxmlformats.org/presentationml/2006/main">
   <p:cSld>
+    <p:bg>
+      <p:bgPr>
+        <a:blipFill rotWithShape="1">
+          <a:blip r:embed="rId3">
+            <a:duotone>
+              <a:schemeClr val="bg2">
+                <a:shade val="69000"/>
+                <a:hueMod val="108000"/>
+                <a:satMod val="164000"/>
+                <a:lumMod val="74000"/>
+              </a:schemeClr>
+              <a:schemeClr val="bg2">
+                <a:tint val="96000"/>
+                <a:hueMod val="88000"/>
+                <a:satMod val="140000"/>
+                <a:lumMod val="132000"/>
+              </a:schemeClr>
+            </a:duotone>
+          </a:blip>
+          <a:stretch/>
+        </a:blipFill>
+        <a:effectLst/>
+      </p:bgPr>
+    </p:bg>
     <p:spTree>
       <p:nvGrpSpPr>
         <p:cNvPr id="1" name=""/>
@@ -31215,21 +31239,127 @@
         </p:nvSpPr>
         <p:spPr>
           <a:xfrm>
-            <a:off x="729796" y="677335"/>
-            <a:ext cx="3020937" cy="778932"/>
+            <a:off x="646111" y="609601"/>
+            <a:ext cx="4793473" cy="1675975"/>
           </a:xfrm>
         </p:spPr>
+        <p:txBody>
+          <a:bodyPr>
+            <a:normAutofit/>
+          </a:bodyPr>
+          <a:lstStyle/>
+          <a:p>
+            <a:r>
+              <a:rPr lang="hu-HU" b="1">
+                <a:latin typeface="Times New Roman" panose="02020603050405020304" pitchFamily="18" charset="0"/>
+                <a:cs typeface="Times New Roman" panose="02020603050405020304" pitchFamily="18" charset="0"/>
+              </a:rPr>
+              <a:t>GIT</a:t>
+            </a:r>
+          </a:p>
+        </p:txBody>
+      </p:sp>
+      <p:pic>
+        <p:nvPicPr>
+          <p:cNvPr id="8" name="Kép 7">
+            <a:extLst>
+              <a:ext uri="{FF2B5EF4-FFF2-40B4-BE49-F238E27FC236}">
+                <a16:creationId xmlns:a16="http://schemas.microsoft.com/office/drawing/2014/main" id="{120C708E-2989-B2FB-0382-5CF234CE1FCD}"/>
+              </a:ext>
+            </a:extLst>
+          </p:cNvPr>
+          <p:cNvPicPr>
+            <a:picLocks noChangeAspect="1"/>
+          </p:cNvPicPr>
+          <p:nvPr/>
+        </p:nvPicPr>
+        <p:blipFill>
+          <a:blip r:embed="rId4">
+            <a:extLst>
+              <a:ext uri="{28A0092B-C50C-407E-A947-70E740481C1C}">
+                <a14:useLocalDpi xmlns:a14="http://schemas.microsoft.com/office/drawing/2010/main" val="0"/>
+              </a:ext>
+            </a:extLst>
+          </a:blip>
+          <a:srcRect r="5926" b="-1"/>
+          <a:stretch>
+            <a:fillRect/>
+          </a:stretch>
+        </p:blipFill>
+        <p:spPr>
+          <a:xfrm>
+            <a:off x="6094412" y="609137"/>
+            <a:ext cx="5449888" cy="2766290"/>
+          </a:xfrm>
+          <a:prstGeom prst="rect">
+            <a:avLst/>
+          </a:prstGeom>
+          <a:effectLst>
+            <a:outerShdw blurRad="50800" dist="38100" dir="5400000" algn="t" rotWithShape="0">
+              <a:prstClr val="black">
+                <a:alpha val="43000"/>
+              </a:prstClr>
+            </a:outerShdw>
+          </a:effectLst>
+        </p:spPr>
+      </p:pic>
+      <p:sp>
+        <p:nvSpPr>
+          <p:cNvPr id="13" name="Rectangle 12">
+            <a:extLst>
+              <a:ext uri="{FF2B5EF4-FFF2-40B4-BE49-F238E27FC236}">
+                <a16:creationId xmlns:a16="http://schemas.microsoft.com/office/drawing/2014/main" id="{AC546BE4-C7A3-4A47-9FA5-0866D5E656B4}"/>
+              </a:ext>
+              <a:ext uri="{C183D7F6-B498-43B3-948B-1728B52AA6E4}">
+                <adec:decorative xmlns:adec="http://schemas.microsoft.com/office/drawing/2017/decorative" val="1"/>
+              </a:ext>
+            </a:extLst>
+          </p:cNvPr>
+          <p:cNvSpPr>
+            <a:spLocks noGrp="1" noRot="1" noChangeAspect="1" noMove="1" noResize="1" noEditPoints="1" noAdjustHandles="1" noChangeArrowheads="1" noChangeShapeType="1" noTextEdit="1"/>
+          </p:cNvSpPr>
+          <p:nvPr>
+            <p:extLst>
+              <p:ext uri="{386F3935-93C4-4BCD-93E2-E3B085C9AB24}">
+                <p16:designElem xmlns:p16="http://schemas.microsoft.com/office/powerpoint/2015/main" val="1"/>
+              </p:ext>
+            </p:extLst>
+          </p:nvPr>
+        </p:nvSpPr>
+        <p:spPr>
+          <a:xfrm>
+            <a:off x="10437812" y="0"/>
+            <a:ext cx="685800" cy="1143000"/>
+          </a:xfrm>
+          <a:prstGeom prst="rect">
+            <a:avLst/>
+          </a:prstGeom>
+          <a:solidFill>
+            <a:schemeClr val="accent1"/>
+          </a:solidFill>
+          <a:ln>
+            <a:noFill/>
+          </a:ln>
+        </p:spPr>
+        <p:style>
+          <a:lnRef idx="1">
+            <a:schemeClr val="accent1"/>
+          </a:lnRef>
+          <a:fillRef idx="3">
+            <a:schemeClr val="accent1"/>
+          </a:fillRef>
+          <a:effectRef idx="2">
+            <a:schemeClr val="accent1"/>
+          </a:effectRef>
+          <a:fontRef idx="minor">
+            <a:schemeClr val="lt1"/>
+          </a:fontRef>
+        </p:style>
         <p:txBody>
           <a:bodyPr/>
           <a:lstStyle/>
           <a:p>
-            <a:r>
-              <a:rPr lang="hu-HU" b="1">
-                <a:latin typeface="Times New Roman" panose="02020603050405020304" pitchFamily="18" charset="0"/>
-                <a:cs typeface="Times New Roman" panose="02020603050405020304" pitchFamily="18" charset="0"/>
-              </a:rPr>
-              <a:t>GIT</a:t>
-            </a:r>
+            <a:endParaRPr lang="hu-HU"/>
           </a:p>
         </p:txBody>
       </p:sp>
@@ -31251,40 +31381,39 @@
         </p:nvSpPr>
         <p:spPr>
           <a:xfrm>
-            <a:off x="1103312" y="1691092"/>
-            <a:ext cx="8946541" cy="1147482"/>
+            <a:off x="642175" y="2484544"/>
+            <a:ext cx="4799145" cy="3763855"/>
           </a:xfrm>
         </p:spPr>
         <p:txBody>
-          <a:bodyPr/>
+          <a:bodyPr>
+            <a:normAutofit/>
+          </a:bodyPr>
           <a:lstStyle/>
           <a:p>
-            <a:pPr algn="just">
-              <a:lnSpc>
-                <a:spcPct val="115000"/>
-              </a:lnSpc>
+            <a:pPr>
               <a:spcAft>
                 <a:spcPts val="600"/>
               </a:spcAft>
             </a:pPr>
             <a:r>
-              <a:rPr lang="en-US" sz="1800" dirty="0">
+              <a:rPr lang="en-US">
                 <a:effectLst/>
                 <a:latin typeface="Times New Roman" panose="02020603050405020304" pitchFamily="18" charset="0"/>
                 <a:ea typeface="Aptos" panose="020B0004020202020204" pitchFamily="34" charset="0"/>
               </a:rPr>
               <a:t>Git is a version control system that can be used for efficient management and tracking of code changes. It enables developers to manage different file versions and modifications, allowing restoration to previous states.</a:t>
             </a:r>
-            <a:endParaRPr lang="hu-HU" dirty="0"/>
+            <a:endParaRPr lang="hu-HU"/>
           </a:p>
         </p:txBody>
       </p:sp>
       <p:pic>
         <p:nvPicPr>
-          <p:cNvPr id="5" name="Kép 4">
+          <p:cNvPr id="6" name="Kép 5">
             <a:extLst>
               <a:ext uri="{FF2B5EF4-FFF2-40B4-BE49-F238E27FC236}">
-                <a16:creationId xmlns:a16="http://schemas.microsoft.com/office/drawing/2014/main" id="{3ECB429A-A68C-B41E-20D5-939DECB5D4BA}"/>
+                <a16:creationId xmlns:a16="http://schemas.microsoft.com/office/drawing/2014/main" id="{90855359-CBFF-2069-00BC-AD73449143FF}"/>
               </a:ext>
             </a:extLst>
           </p:cNvPr>
@@ -31294,19 +31423,33 @@
           <p:nvPr/>
         </p:nvPicPr>
         <p:blipFill>
-          <a:blip r:embed="rId3"/>
+          <a:blip r:embed="rId5">
+            <a:extLst>
+              <a:ext uri="{28A0092B-C50C-407E-A947-70E740481C1C}">
+                <a14:useLocalDpi xmlns:a14="http://schemas.microsoft.com/office/drawing/2010/main" val="0"/>
+              </a:ext>
+            </a:extLst>
+          </a:blip>
+          <a:srcRect r="5926" b="-1"/>
           <a:stretch>
             <a:fillRect/>
           </a:stretch>
         </p:blipFill>
         <p:spPr>
           <a:xfrm>
-            <a:off x="2297289" y="3073400"/>
-            <a:ext cx="7597422" cy="3598779"/>
+            <a:off x="6094412" y="3482108"/>
+            <a:ext cx="5449888" cy="2766290"/>
           </a:xfrm>
           <a:prstGeom prst="rect">
             <a:avLst/>
           </a:prstGeom>
+          <a:effectLst>
+            <a:outerShdw blurRad="50800" dist="38100" dir="5400000" algn="t" rotWithShape="0">
+              <a:prstClr val="black">
+                <a:alpha val="43000"/>
+              </a:prstClr>
+            </a:outerShdw>
+          </a:effectLst>
         </p:spPr>
       </p:pic>
     </p:spTree>
@@ -31337,6 +31480,30 @@
 <file path=ppt/slides/slide14.xml><?xml version="1.0" encoding="utf-8"?>
 <p:sld xmlns:a="http://schemas.openxmlformats.org/drawingml/2006/main" xmlns:r="http://schemas.openxmlformats.org/officeDocument/2006/relationships" xmlns:p="http://schemas.openxmlformats.org/presentationml/2006/main">
   <p:cSld>
+    <p:bg>
+      <p:bgPr>
+        <a:blipFill rotWithShape="1">
+          <a:blip r:embed="rId3">
+            <a:duotone>
+              <a:schemeClr val="bg2">
+                <a:shade val="69000"/>
+                <a:hueMod val="108000"/>
+                <a:satMod val="164000"/>
+                <a:lumMod val="74000"/>
+              </a:schemeClr>
+              <a:schemeClr val="bg2">
+                <a:tint val="96000"/>
+                <a:hueMod val="88000"/>
+                <a:satMod val="140000"/>
+                <a:lumMod val="132000"/>
+              </a:schemeClr>
+            </a:duotone>
+          </a:blip>
+          <a:stretch/>
+        </a:blipFill>
+        <a:effectLst/>
+      </p:bgPr>
+    </p:bg>
     <p:spTree>
       <p:nvGrpSpPr>
         <p:cNvPr id="1" name=""/>
@@ -31369,12 +31536,14 @@
         </p:nvSpPr>
         <p:spPr>
           <a:xfrm>
-            <a:off x="823912" y="706718"/>
-            <a:ext cx="1165756" cy="690282"/>
+            <a:off x="648930" y="629266"/>
+            <a:ext cx="9252154" cy="1223983"/>
           </a:xfrm>
         </p:spPr>
         <p:txBody>
-          <a:bodyPr/>
+          <a:bodyPr>
+            <a:normAutofit/>
+          </a:bodyPr>
           <a:lstStyle/>
           <a:p>
             <a:r>
@@ -31406,8 +31575,8 @@
         </p:nvSpPr>
         <p:spPr>
           <a:xfrm>
-            <a:off x="1094168" y="1750845"/>
-            <a:ext cx="8946541" cy="1372821"/>
+            <a:off x="392111" y="2848730"/>
+            <a:ext cx="4338409" cy="4196185"/>
           </a:xfrm>
         </p:spPr>
         <p:txBody>
@@ -31417,13 +31586,13 @@
           <a:lstStyle/>
           <a:p>
             <a:r>
-              <a:rPr lang="en-US" sz="2400" dirty="0">
+              <a:rPr lang="en-US" dirty="0">
                 <a:latin typeface="Times New Roman" panose="02020603050405020304" pitchFamily="18" charset="0"/>
                 <a:cs typeface="Times New Roman" panose="02020603050405020304" pitchFamily="18" charset="0"/>
               </a:rPr>
               <a:t>We log work hours in Jira. This platform is used to verify at the end whether actual work was done during the year or if the project was just hastily assembled.</a:t>
             </a:r>
-            <a:endParaRPr lang="hu-HU" sz="2400" dirty="0">
+            <a:endParaRPr lang="hu-HU" dirty="0">
               <a:latin typeface="Times New Roman" panose="02020603050405020304" pitchFamily="18" charset="0"/>
               <a:cs typeface="Times New Roman" panose="02020603050405020304" pitchFamily="18" charset="0"/>
             </a:endParaRPr>
@@ -31432,10 +31601,10 @@
       </p:sp>
       <p:pic>
         <p:nvPicPr>
-          <p:cNvPr id="5" name="Kép 4">
+          <p:cNvPr id="6" name="Kép 5">
             <a:extLst>
               <a:ext uri="{FF2B5EF4-FFF2-40B4-BE49-F238E27FC236}">
-                <a16:creationId xmlns:a16="http://schemas.microsoft.com/office/drawing/2014/main" id="{610B53AA-05ED-4376-94CB-CEE8A3B7EF83}"/>
+                <a16:creationId xmlns:a16="http://schemas.microsoft.com/office/drawing/2014/main" id="{B16BD123-BE22-9C0A-2A09-6E68661F0F10}"/>
               </a:ext>
             </a:extLst>
           </p:cNvPr>
@@ -31445,19 +31614,32 @@
           <p:nvPr/>
         </p:nvPicPr>
         <p:blipFill>
-          <a:blip r:embed="rId3"/>
+          <a:blip r:embed="rId4">
+            <a:extLst>
+              <a:ext uri="{28A0092B-C50C-407E-A947-70E740481C1C}">
+                <a14:useLocalDpi xmlns:a14="http://schemas.microsoft.com/office/drawing/2010/main" val="0"/>
+              </a:ext>
+            </a:extLst>
+          </a:blip>
           <a:stretch>
             <a:fillRect/>
           </a:stretch>
         </p:blipFill>
         <p:spPr>
           <a:xfrm>
-            <a:off x="2516612" y="3252004"/>
-            <a:ext cx="7158775" cy="3416433"/>
+            <a:off x="4923516" y="2113280"/>
+            <a:ext cx="6970559" cy="3328441"/>
           </a:xfrm>
           <a:prstGeom prst="rect">
             <a:avLst/>
           </a:prstGeom>
+          <a:effectLst>
+            <a:outerShdw blurRad="50800" dist="38100" dir="5400000" algn="t" rotWithShape="0">
+              <a:prstClr val="black">
+                <a:alpha val="43000"/>
+              </a:prstClr>
+            </a:outerShdw>
+          </a:effectLst>
         </p:spPr>
       </p:pic>
     </p:spTree>
